--- a/media/resources/files/ButunSandardyJanaOnduktar_Aralash_Amaldar_XjanaO_iu3ta5S.pptx
+++ b/media/resources/files/ButunSandardyJanaOnduktar_Aralash_Amaldar_XjanaO_iu3ta5S.pptx
@@ -8454,7 +8454,7 @@
                 <a:ea typeface="+mn-ea"/>
                 <a:cs typeface="+mn-cs"/>
               </a:rPr>
-              <a:t>Турдуу пикирлер учун ыраазычылык билдиребиз.</a:t>
+              <a:t>Түрдүү пикирлер үчүн ыраазычылык билдиребиз.</a:t>
             </a:r>
           </a:p>
           <a:p>

--- a/media/resources/files/ButunSandardyJanaOnduktar_Aralash_Amaldar_XjanaO_iu3ta5S.pptx
+++ b/media/resources/files/ButunSandardyJanaOnduktar_Aralash_Amaldar_XjanaO_iu3ta5S.pptx
@@ -3935,7 +3935,7 @@
                 <a:ea typeface="+mn-ea"/>
                 <a:cs typeface="Arial" panose="020B0604020202020204" pitchFamily="34" charset="0"/>
               </a:rPr>
-              <a:t>Мугалим үчүн жооп баракчасы жана таратма материалдар камтылган.</a:t>
+              <a:t>Мугалим үчүн жооп барагы жана таратма материалдар бар.</a:t>
             </a:r>
           </a:p>
           <a:p>
@@ -4004,7 +4004,7 @@
                 <a:ea typeface="+mn-ea"/>
                 <a:cs typeface="Arial" panose="020B0604020202020204" pitchFamily="34" charset="0"/>
               </a:rPr>
-              <a:t>Кайсы команда туура жооп бергенине жараша '</a:t>
+              <a:t>Туура жооп берген командага жараша «</a:t>
             </a:r>
             <a:r>
               <a:rPr kumimoji="0" lang="en-GB" sz="2000" b="0" i="0" u="sng" strike="noStrike" kern="1200" cap="none" spc="0" normalizeH="0" baseline="0" noProof="0" dirty="0">
@@ -4021,7 +4021,7 @@
                 <a:ea typeface="+mn-ea"/>
                 <a:cs typeface="Arial" panose="020B0604020202020204" pitchFamily="34" charset="0"/>
               </a:rPr>
-              <a:t>X' </a:t>
+              <a:t>X» </a:t>
             </a:r>
             <a:r>
               <a:rPr kumimoji="0" lang="ru-RU" sz="2000" b="0" i="0" u="sng" strike="noStrike" kern="1200" cap="none" spc="0" normalizeH="0" baseline="0" noProof="0" dirty="0">
@@ -4038,7 +4038,7 @@
                 <a:ea typeface="+mn-ea"/>
                 <a:cs typeface="Arial" panose="020B0604020202020204" pitchFamily="34" charset="0"/>
               </a:rPr>
-              <a:t>же '</a:t>
+              <a:t>же «</a:t>
             </a:r>
             <a:r>
               <a:rPr kumimoji="0" lang="en-GB" sz="2000" b="0" i="0" u="sng" strike="noStrike" kern="1200" cap="none" spc="0" normalizeH="0" baseline="0" noProof="0" dirty="0">
@@ -4055,7 +4055,7 @@
                 <a:ea typeface="+mn-ea"/>
                 <a:cs typeface="Arial" panose="020B0604020202020204" pitchFamily="34" charset="0"/>
               </a:rPr>
-              <a:t>O' </a:t>
+              <a:t>O» </a:t>
             </a:r>
             <a:r>
               <a:rPr kumimoji="0" lang="ru-RU" sz="2000" b="0" i="0" u="sng" strike="noStrike" kern="1200" cap="none" spc="0" normalizeH="0" baseline="0" noProof="0" dirty="0">
@@ -4072,7 +4072,7 @@
                 <a:ea typeface="+mn-ea"/>
                 <a:cs typeface="Arial" panose="020B0604020202020204" pitchFamily="34" charset="0"/>
               </a:rPr>
-              <a:t>баскычын басыңыз/тийип коюңуз</a:t>
+              <a:t>баскычын басыңыз</a:t>
             </a:r>
             <a:r>
               <a:rPr kumimoji="0" lang="en-GB" sz="2000" b="0" i="0" u="none" strike="noStrike" kern="1200" cap="none" spc="0" normalizeH="0" baseline="0" noProof="0" dirty="0">
@@ -4720,7 +4720,7 @@
             <a:pPr algn="ctr"/>
             <a:r>
               <a:rPr lang="en-GB" sz="4000" dirty="0"/>
-              <a:t>0.91 + 3 + 1.8</a:t>
+              <a:t>0,91 + 3 + 1,8</a:t>
             </a:r>
           </a:p>
         </p:txBody>
@@ -4767,7 +4767,7 @@
             </a:r>
             <a:r>
               <a:rPr lang="en-GB" sz="4000" dirty="0"/>
-              <a:t> 3.2</a:t>
+              <a:t> 3,2</a:t>
             </a:r>
           </a:p>
         </p:txBody>
@@ -4803,7 +4803,7 @@
             <a:pPr algn="ctr"/>
             <a:r>
               <a:rPr lang="en-GB" sz="4000" dirty="0"/>
-              <a:t>5 × 1.34</a:t>
+              <a:t>5 × 1,34</a:t>
             </a:r>
           </a:p>
         </p:txBody>
@@ -4850,7 +4850,7 @@
             </a:r>
             <a:r>
               <a:rPr lang="en-GB" sz="4000" dirty="0"/>
-              <a:t> 3.76</a:t>
+              <a:t> 3,76</a:t>
             </a:r>
           </a:p>
         </p:txBody>
@@ -4886,7 +4886,7 @@
             <a:pPr algn="ctr"/>
             <a:r>
               <a:rPr lang="en-GB" sz="4000" dirty="0"/>
-              <a:t>7 + 1.7 + 3.51</a:t>
+              <a:t>7 + 1,7 + 3,51</a:t>
             </a:r>
           </a:p>
         </p:txBody>
@@ -4922,7 +4922,7 @@
             <a:pPr algn="ctr"/>
             <a:r>
               <a:rPr lang="en-GB" sz="4000" dirty="0"/>
-              <a:t>3.13 × 3</a:t>
+              <a:t>3,13 × 3</a:t>
             </a:r>
           </a:p>
         </p:txBody>
@@ -4958,7 +4958,7 @@
             <a:pPr algn="ctr"/>
             <a:r>
               <a:rPr lang="en-GB" sz="4000" dirty="0"/>
-              <a:t>6.4 ÷ 4</a:t>
+              <a:t>6,4 ÷ 4</a:t>
             </a:r>
           </a:p>
         </p:txBody>
@@ -4994,7 +4994,7 @@
             <a:pPr algn="ctr"/>
             <a:r>
               <a:rPr lang="en-GB" sz="4000" dirty="0"/>
-              <a:t>2.6 × 8</a:t>
+              <a:t>2,6 × 8</a:t>
             </a:r>
           </a:p>
         </p:txBody>
@@ -5030,7 +5030,7 @@
             <a:pPr algn="ctr"/>
             <a:r>
               <a:rPr lang="en-GB" sz="4000" dirty="0"/>
-              <a:t>12 ÷ 0.4</a:t>
+              <a:t>12 ÷ 0,4</a:t>
             </a:r>
           </a:p>
         </p:txBody>
